--- a/项目路演ppt-第四组2.0.pptx
+++ b/项目路演ppt-第四组2.0.pptx
@@ -6192,7 +6192,47 @@
                 <a:latin typeface="Arial" panose="020B0604020202020204" pitchFamily="34" charset="0"/>
                 <a:cs typeface="Arial" panose="020B0604020202020204" pitchFamily="34" charset="0"/>
               </a:rPr>
-              <a:t>管理端：Qt Widgets、Qt Charts、Qt Network；</a:t>
+              <a:t>管理端： Qt 6、C++</a:t>
+            </a:r>
+            <a:r>
+              <a:rPr lang="en-US" altLang="zh-CN" sz="2000" dirty="0">
+                <a:solidFill>
+                  <a:srgbClr val="FFFFFF"/>
+                </a:solidFill>
+                <a:latin typeface="Arial" panose="020B0604020202020204" pitchFamily="34" charset="0"/>
+                <a:cs typeface="Arial" panose="020B0604020202020204" pitchFamily="34" charset="0"/>
+              </a:rPr>
+              <a:t>17 </a:t>
+            </a:r>
+            <a:r>
+              <a:rPr lang="zh-CN" altLang="en-US" sz="2000">
+                <a:solidFill>
+                  <a:srgbClr val="FFFFFF"/>
+                </a:solidFill>
+                <a:latin typeface="Arial" panose="020B0604020202020204" pitchFamily="34" charset="0"/>
+                <a:cs typeface="Arial" panose="020B0604020202020204" pitchFamily="34" charset="0"/>
+              </a:rPr>
+              <a:t>、</a:t>
+            </a:r>
+            <a:r>
+              <a:rPr lang="zh-CN" altLang="zh-CN" sz="2000">
+                <a:solidFill>
+                  <a:srgbClr val="FFFFFF"/>
+                </a:solidFill>
+                <a:latin typeface="Arial" panose="020B0604020202020204" pitchFamily="34" charset="0"/>
+                <a:cs typeface="Arial" panose="020B0604020202020204" pitchFamily="34" charset="0"/>
+              </a:rPr>
+              <a:t>Q</a:t>
+            </a:r>
+            <a:r>
+              <a:rPr lang="zh-CN" altLang="zh-CN" sz="2000" dirty="0">
+                <a:solidFill>
+                  <a:srgbClr val="FFFFFF"/>
+                </a:solidFill>
+                <a:latin typeface="Arial" panose="020B0604020202020204" pitchFamily="34" charset="0"/>
+                <a:cs typeface="Arial" panose="020B0604020202020204" pitchFamily="34" charset="0"/>
+              </a:rPr>
+              <a:t>t Widgets、Qt Charts、Qt Network；</a:t>
             </a:r>
             <a:endParaRPr lang="en-US" altLang="zh-CN" sz="2000" dirty="0">
               <a:solidFill>
